--- a/AgriAssist_Final_Presentation.pptx
+++ b/AgriAssist_Final_Presentation.pptx
@@ -5,7 +5,7 @@
     <p:sldMasterId id="2147483648" r:id="rId1"/>
   </p:sldMasterIdLst>
   <p:notesMasterIdLst>
-    <p:notesMasterId r:id="rId12"/>
+    <p:notesMasterId r:id="rId13"/>
   </p:notesMasterIdLst>
   <p:sldIdLst>
     <p:sldId id="256" r:id="rId2"/>
@@ -17,7 +17,8 @@
     <p:sldId id="262" r:id="rId8"/>
     <p:sldId id="263" r:id="rId9"/>
     <p:sldId id="264" r:id="rId10"/>
-    <p:sldId id="265" r:id="rId11"/>
+    <p:sldId id="266" r:id="rId11"/>
+    <p:sldId id="265" r:id="rId12"/>
   </p:sldIdLst>
   <p:sldSz cx="9144000" cy="5143500" type="screen16x9"/>
   <p:notesSz cx="5143500" cy="9144000"/>
@@ -342,6 +343,121 @@
   <p:cSld>
     <p:spTree>
       <p:nvGrpSpPr>
+        <p:cNvPr id="1" name="">
+          <a:extLst>
+            <a:ext uri="{FF2B5EF4-FFF2-40B4-BE49-F238E27FC236}">
+              <a16:creationId xmlns:a16="http://schemas.microsoft.com/office/drawing/2014/main" id="{EEB6EA37-7D30-AF3E-2B78-D36F9B7FD97F}"/>
+            </a:ext>
+          </a:extLst>
+        </p:cNvPr>
+        <p:cNvGrpSpPr/>
+        <p:nvPr/>
+      </p:nvGrpSpPr>
+      <p:grpSpPr>
+        <a:xfrm>
+          <a:off x="0" y="0"/>
+          <a:ext cx="0" cy="0"/>
+          <a:chOff x="0" y="0"/>
+          <a:chExt cx="0" cy="0"/>
+        </a:xfrm>
+      </p:grpSpPr>
+      <p:sp>
+        <p:nvSpPr>
+          <p:cNvPr id="2" name="Slide Image Placeholder 1">
+            <a:extLst>
+              <a:ext uri="{FF2B5EF4-FFF2-40B4-BE49-F238E27FC236}">
+                <a16:creationId xmlns:a16="http://schemas.microsoft.com/office/drawing/2014/main" id="{05FAFD25-629A-6218-3DFD-31D8748B8F29}"/>
+              </a:ext>
+            </a:extLst>
+          </p:cNvPr>
+          <p:cNvSpPr>
+            <a:spLocks noGrp="1" noRot="1" noChangeAspect="1"/>
+          </p:cNvSpPr>
+          <p:nvPr>
+            <p:ph type="sldImg"/>
+          </p:nvPr>
+        </p:nvSpPr>
+        <p:spPr/>
+        <p:txBody>
+          <a:bodyPr/>
+          <a:lstStyle/>
+          <a:p>
+            <a:endParaRPr lang="en-IN"/>
+          </a:p>
+        </p:txBody>
+      </p:sp>
+      <p:sp>
+        <p:nvSpPr>
+          <p:cNvPr id="3" name="Notes Placeholder 2">
+            <a:extLst>
+              <a:ext uri="{FF2B5EF4-FFF2-40B4-BE49-F238E27FC236}">
+                <a16:creationId xmlns:a16="http://schemas.microsoft.com/office/drawing/2014/main" id="{AE1207B3-8625-2FC8-D349-4C4DD7ACA4D4}"/>
+              </a:ext>
+            </a:extLst>
+          </p:cNvPr>
+          <p:cNvSpPr>
+            <a:spLocks noGrp="1"/>
+          </p:cNvSpPr>
+          <p:nvPr>
+            <p:ph type="body" idx="1"/>
+          </p:nvPr>
+        </p:nvSpPr>
+        <p:spPr/>
+        <p:txBody>
+          <a:bodyPr/>
+          <a:lstStyle/>
+          <a:p>
+            <a:endParaRPr lang="en-US" dirty="0"/>
+          </a:p>
+        </p:txBody>
+      </p:sp>
+      <p:sp>
+        <p:nvSpPr>
+          <p:cNvPr id="4" name="Slide Number Placeholder 3">
+            <a:extLst>
+              <a:ext uri="{FF2B5EF4-FFF2-40B4-BE49-F238E27FC236}">
+                <a16:creationId xmlns:a16="http://schemas.microsoft.com/office/drawing/2014/main" id="{587B10EB-D0EE-CCD6-86CF-65F787A8E2E1}"/>
+              </a:ext>
+            </a:extLst>
+          </p:cNvPr>
+          <p:cNvSpPr>
+            <a:spLocks noGrp="1"/>
+          </p:cNvSpPr>
+          <p:nvPr>
+            <p:ph type="sldNum" sz="quarter" idx="10"/>
+          </p:nvPr>
+        </p:nvSpPr>
+        <p:spPr/>
+        <p:txBody>
+          <a:bodyPr/>
+          <a:lstStyle/>
+          <a:p>
+            <a:fld id="{F7021451-1387-4CA6-816F-3879F97B5CBC}" type="slidenum">
+              <a:rPr lang="en-US"/>
+              <a:t>10</a:t>
+            </a:fld>
+            <a:endParaRPr lang="en-US"/>
+          </a:p>
+        </p:txBody>
+      </p:sp>
+    </p:spTree>
+    <p:extLst>
+      <p:ext uri="{BB962C8B-B14F-4D97-AF65-F5344CB8AC3E}">
+        <p14:creationId xmlns:p14="http://schemas.microsoft.com/office/powerpoint/2010/main" val="1987095453"/>
+      </p:ext>
+    </p:extLst>
+  </p:cSld>
+  <p:clrMapOvr>
+    <a:masterClrMapping/>
+  </p:clrMapOvr>
+</p:notes>
+</file>
+
+<file path=ppt/notesSlides/notesSlide11.xml><?xml version="1.0" encoding="utf-8"?>
+<p:notes xmlns:a="http://schemas.openxmlformats.org/drawingml/2006/main" xmlns:r="http://schemas.openxmlformats.org/officeDocument/2006/relationships" xmlns:p="http://schemas.openxmlformats.org/presentationml/2006/main">
+  <p:cSld>
+    <p:spTree>
+      <p:nvGrpSpPr>
         <p:cNvPr id="1" name=""/>
         <p:cNvGrpSpPr/>
         <p:nvPr/>
@@ -409,7 +525,7 @@
           <a:p>
             <a:fld id="{F7021451-1387-4CA6-816F-3879F97B5CBC}" type="slidenum">
               <a:rPr lang="en-US"/>
-              <a:t>10</a:t>
+              <a:t>11</a:t>
             </a:fld>
             <a:endParaRPr lang="en-US"/>
           </a:p>
@@ -2119,6 +2235,374 @@
 </file>
 
 <file path=ppt/slides/slide10.xml><?xml version="1.0" encoding="utf-8"?>
+<p:sld xmlns:a="http://schemas.openxmlformats.org/drawingml/2006/main" xmlns:r="http://schemas.openxmlformats.org/officeDocument/2006/relationships" xmlns:p="http://schemas.openxmlformats.org/presentationml/2006/main">
+  <p:cSld>
+    <p:bg>
+      <p:bgPr>
+        <a:solidFill>
+          <a:srgbClr val="FFFFFF"/>
+        </a:solidFill>
+        <a:effectLst/>
+      </p:bgPr>
+    </p:bg>
+    <p:spTree>
+      <p:nvGrpSpPr>
+        <p:cNvPr id="1" name="">
+          <a:extLst>
+            <a:ext uri="{FF2B5EF4-FFF2-40B4-BE49-F238E27FC236}">
+              <a16:creationId xmlns:a16="http://schemas.microsoft.com/office/drawing/2014/main" id="{2D3128C5-FE52-A74C-6385-0129EA524655}"/>
+            </a:ext>
+          </a:extLst>
+        </p:cNvPr>
+        <p:cNvGrpSpPr/>
+        <p:nvPr/>
+      </p:nvGrpSpPr>
+      <p:grpSpPr>
+        <a:xfrm>
+          <a:off x="0" y="0"/>
+          <a:ext cx="0" cy="0"/>
+          <a:chOff x="0" y="0"/>
+          <a:chExt cx="0" cy="0"/>
+        </a:xfrm>
+      </p:grpSpPr>
+      <p:sp>
+        <p:nvSpPr>
+          <p:cNvPr id="2" name="Shape 0">
+            <a:extLst>
+              <a:ext uri="{FF2B5EF4-FFF2-40B4-BE49-F238E27FC236}">
+                <a16:creationId xmlns:a16="http://schemas.microsoft.com/office/drawing/2014/main" id="{662B1BD8-B10F-0022-F0EB-6E93808B244C}"/>
+              </a:ext>
+            </a:extLst>
+          </p:cNvPr>
+          <p:cNvSpPr/>
+          <p:nvPr/>
+        </p:nvSpPr>
+        <p:spPr>
+          <a:xfrm>
+            <a:off x="7772400" y="0"/>
+            <a:ext cx="1371600" cy="1645920"/>
+          </a:xfrm>
+          <a:prstGeom prst="rect">
+            <a:avLst/>
+          </a:prstGeom>
+          <a:solidFill>
+            <a:srgbClr val="B8D8E8"/>
+          </a:solidFill>
+          <a:ln w="12700">
+            <a:solidFill>
+              <a:srgbClr val="B8D8E8"/>
+            </a:solidFill>
+            <a:prstDash val="solid"/>
+          </a:ln>
+        </p:spPr>
+        <p:txBody>
+          <a:bodyPr/>
+          <a:lstStyle/>
+          <a:p>
+            <a:endParaRPr lang="en-IN"/>
+          </a:p>
+        </p:txBody>
+      </p:sp>
+      <p:sp>
+        <p:nvSpPr>
+          <p:cNvPr id="3" name="Shape 1">
+            <a:extLst>
+              <a:ext uri="{FF2B5EF4-FFF2-40B4-BE49-F238E27FC236}">
+                <a16:creationId xmlns:a16="http://schemas.microsoft.com/office/drawing/2014/main" id="{1E1329A8-DF15-D7E2-37BC-33A03BC9BB89}"/>
+              </a:ext>
+            </a:extLst>
+          </p:cNvPr>
+          <p:cNvSpPr/>
+          <p:nvPr/>
+        </p:nvSpPr>
+        <p:spPr>
+          <a:xfrm>
+            <a:off x="7498080" y="3840480"/>
+            <a:ext cx="1645920" cy="1303020"/>
+          </a:xfrm>
+          <a:prstGeom prst="rect">
+            <a:avLst/>
+          </a:prstGeom>
+          <a:solidFill>
+            <a:srgbClr val="B8D8E8"/>
+          </a:solidFill>
+          <a:ln w="12700">
+            <a:solidFill>
+              <a:srgbClr val="B8D8E8"/>
+            </a:solidFill>
+            <a:prstDash val="solid"/>
+          </a:ln>
+        </p:spPr>
+        <p:txBody>
+          <a:bodyPr/>
+          <a:lstStyle/>
+          <a:p>
+            <a:endParaRPr lang="en-IN"/>
+          </a:p>
+        </p:txBody>
+      </p:sp>
+      <p:sp>
+        <p:nvSpPr>
+          <p:cNvPr id="4" name="Shape 2">
+            <a:extLst>
+              <a:ext uri="{FF2B5EF4-FFF2-40B4-BE49-F238E27FC236}">
+                <a16:creationId xmlns:a16="http://schemas.microsoft.com/office/drawing/2014/main" id="{0AAB6EFF-1D02-8736-639B-5DD1AF591350}"/>
+              </a:ext>
+            </a:extLst>
+          </p:cNvPr>
+          <p:cNvSpPr/>
+          <p:nvPr/>
+        </p:nvSpPr>
+        <p:spPr>
+          <a:xfrm>
+            <a:off x="320040" y="137160"/>
+            <a:ext cx="502920" cy="164592"/>
+          </a:xfrm>
+          <a:prstGeom prst="rect">
+            <a:avLst/>
+          </a:prstGeom>
+          <a:solidFill>
+            <a:srgbClr val="7EC8E3"/>
+          </a:solidFill>
+          <a:ln w="12700">
+            <a:solidFill>
+              <a:srgbClr val="7EC8E3"/>
+            </a:solidFill>
+            <a:prstDash val="solid"/>
+          </a:ln>
+        </p:spPr>
+        <p:txBody>
+          <a:bodyPr/>
+          <a:lstStyle/>
+          <a:p>
+            <a:endParaRPr lang="en-IN"/>
+          </a:p>
+        </p:txBody>
+      </p:sp>
+      <p:sp>
+        <p:nvSpPr>
+          <p:cNvPr id="5" name="Text 3">
+            <a:extLst>
+              <a:ext uri="{FF2B5EF4-FFF2-40B4-BE49-F238E27FC236}">
+                <a16:creationId xmlns:a16="http://schemas.microsoft.com/office/drawing/2014/main" id="{F99AC203-CE75-543D-5168-568DE3CD5268}"/>
+              </a:ext>
+            </a:extLst>
+          </p:cNvPr>
+          <p:cNvSpPr/>
+          <p:nvPr/>
+        </p:nvSpPr>
+        <p:spPr>
+          <a:xfrm>
+            <a:off x="274320" y="320040"/>
+            <a:ext cx="6858000" cy="777240"/>
+          </a:xfrm>
+          <a:prstGeom prst="rect">
+            <a:avLst/>
+          </a:prstGeom>
+          <a:noFill/>
+          <a:ln/>
+        </p:spPr>
+        <p:txBody>
+          <a:bodyPr wrap="square" lIns="0" tIns="0" rIns="0" bIns="0" rtlCol="0" anchor="ctr"/>
+          <a:lstStyle/>
+          <a:p>
+            <a:pPr marL="0" indent="0">
+              <a:buNone/>
+            </a:pPr>
+            <a:r>
+              <a:rPr lang="en-US" sz="2800" kern="0" spc="600" dirty="0">
+                <a:solidFill>
+                  <a:srgbClr val="1C1C1C"/>
+                </a:solidFill>
+                <a:latin typeface="Calibri" pitchFamily="34" charset="0"/>
+                <a:ea typeface="Calibri" pitchFamily="34" charset="-122"/>
+                <a:cs typeface="Calibri" pitchFamily="34" charset="-120"/>
+              </a:rPr>
+              <a:t>OUTPUT</a:t>
+            </a:r>
+            <a:endParaRPr lang="en-US" sz="2800" dirty="0"/>
+          </a:p>
+        </p:txBody>
+      </p:sp>
+      <p:sp>
+        <p:nvSpPr>
+          <p:cNvPr id="51" name="Text 49">
+            <a:extLst>
+              <a:ext uri="{FF2B5EF4-FFF2-40B4-BE49-F238E27FC236}">
+                <a16:creationId xmlns:a16="http://schemas.microsoft.com/office/drawing/2014/main" id="{5426EEE2-3659-8777-862D-D42D1ABA56C9}"/>
+              </a:ext>
+            </a:extLst>
+          </p:cNvPr>
+          <p:cNvSpPr/>
+          <p:nvPr/>
+        </p:nvSpPr>
+        <p:spPr>
+          <a:xfrm>
+            <a:off x="8065008" y="1737360"/>
+            <a:ext cx="384048" cy="347472"/>
+          </a:xfrm>
+          <a:prstGeom prst="rect">
+            <a:avLst/>
+          </a:prstGeom>
+          <a:noFill/>
+          <a:ln/>
+        </p:spPr>
+        <p:txBody>
+          <a:bodyPr wrap="square" lIns="0" tIns="0" rIns="0" bIns="0" rtlCol="0" anchor="ctr"/>
+          <a:lstStyle/>
+          <a:p>
+            <a:pPr marL="0" indent="0" algn="ctr">
+              <a:buNone/>
+            </a:pPr>
+            <a:r>
+              <a:rPr lang="en-US" sz="1100" b="1" dirty="0">
+                <a:solidFill>
+                  <a:srgbClr val="FFFFFF"/>
+                </a:solidFill>
+                <a:latin typeface="Calibri" pitchFamily="34" charset="0"/>
+                <a:ea typeface="Calibri" pitchFamily="34" charset="-122"/>
+                <a:cs typeface="Calibri" pitchFamily="34" charset="-120"/>
+              </a:rPr>
+              <a:t>6</a:t>
+            </a:r>
+            <a:endParaRPr lang="en-US" sz="1100" dirty="0"/>
+          </a:p>
+        </p:txBody>
+      </p:sp>
+      <p:pic>
+        <p:nvPicPr>
+          <p:cNvPr id="57" name="Picture 56">
+            <a:extLst>
+              <a:ext uri="{FF2B5EF4-FFF2-40B4-BE49-F238E27FC236}">
+                <a16:creationId xmlns:a16="http://schemas.microsoft.com/office/drawing/2014/main" id="{59E79043-0C1E-0F92-2A13-CE86E6D51633}"/>
+              </a:ext>
+            </a:extLst>
+          </p:cNvPr>
+          <p:cNvPicPr>
+            <a:picLocks noChangeAspect="1"/>
+          </p:cNvPicPr>
+          <p:nvPr/>
+        </p:nvPicPr>
+        <p:blipFill>
+          <a:blip r:embed="rId3"/>
+          <a:stretch>
+            <a:fillRect/>
+          </a:stretch>
+        </p:blipFill>
+        <p:spPr>
+          <a:xfrm>
+            <a:off x="145539" y="1874670"/>
+            <a:ext cx="2746717" cy="3135689"/>
+          </a:xfrm>
+          <a:prstGeom prst="rect">
+            <a:avLst/>
+          </a:prstGeom>
+        </p:spPr>
+      </p:pic>
+      <p:pic>
+        <p:nvPicPr>
+          <p:cNvPr id="59" name="Picture 58">
+            <a:extLst>
+              <a:ext uri="{FF2B5EF4-FFF2-40B4-BE49-F238E27FC236}">
+                <a16:creationId xmlns:a16="http://schemas.microsoft.com/office/drawing/2014/main" id="{89365CEE-9276-3355-687A-6F36AAE0AAFB}"/>
+              </a:ext>
+            </a:extLst>
+          </p:cNvPr>
+          <p:cNvPicPr>
+            <a:picLocks noChangeAspect="1"/>
+          </p:cNvPicPr>
+          <p:nvPr/>
+        </p:nvPicPr>
+        <p:blipFill>
+          <a:blip r:embed="rId4"/>
+          <a:stretch>
+            <a:fillRect/>
+          </a:stretch>
+        </p:blipFill>
+        <p:spPr>
+          <a:xfrm>
+            <a:off x="3085523" y="1874670"/>
+            <a:ext cx="2833928" cy="3135689"/>
+          </a:xfrm>
+          <a:prstGeom prst="rect">
+            <a:avLst/>
+          </a:prstGeom>
+        </p:spPr>
+      </p:pic>
+      <p:pic>
+        <p:nvPicPr>
+          <p:cNvPr id="61" name="Picture 60">
+            <a:extLst>
+              <a:ext uri="{FF2B5EF4-FFF2-40B4-BE49-F238E27FC236}">
+                <a16:creationId xmlns:a16="http://schemas.microsoft.com/office/drawing/2014/main" id="{30CAE525-414C-8A1F-475D-F38103BCB689}"/>
+              </a:ext>
+            </a:extLst>
+          </p:cNvPr>
+          <p:cNvPicPr>
+            <a:picLocks noChangeAspect="1"/>
+          </p:cNvPicPr>
+          <p:nvPr/>
+        </p:nvPicPr>
+        <p:blipFill>
+          <a:blip r:embed="rId5"/>
+          <a:stretch>
+            <a:fillRect/>
+          </a:stretch>
+        </p:blipFill>
+        <p:spPr>
+          <a:xfrm>
+            <a:off x="2409248" y="133141"/>
+            <a:ext cx="3637838" cy="1570994"/>
+          </a:xfrm>
+          <a:prstGeom prst="rect">
+            <a:avLst/>
+          </a:prstGeom>
+        </p:spPr>
+      </p:pic>
+      <p:pic>
+        <p:nvPicPr>
+          <p:cNvPr id="63" name="Picture 62">
+            <a:extLst>
+              <a:ext uri="{FF2B5EF4-FFF2-40B4-BE49-F238E27FC236}">
+                <a16:creationId xmlns:a16="http://schemas.microsoft.com/office/drawing/2014/main" id="{B8A161D7-7B02-86FF-D9F1-FCDE20366091}"/>
+              </a:ext>
+            </a:extLst>
+          </p:cNvPr>
+          <p:cNvPicPr>
+            <a:picLocks noChangeAspect="1"/>
+          </p:cNvPicPr>
+          <p:nvPr/>
+        </p:nvPicPr>
+        <p:blipFill>
+          <a:blip r:embed="rId6"/>
+          <a:stretch>
+            <a:fillRect/>
+          </a:stretch>
+        </p:blipFill>
+        <p:spPr>
+          <a:xfrm>
+            <a:off x="6112718" y="1792777"/>
+            <a:ext cx="2885742" cy="3217582"/>
+          </a:xfrm>
+          <a:prstGeom prst="rect">
+            <a:avLst/>
+          </a:prstGeom>
+        </p:spPr>
+      </p:pic>
+    </p:spTree>
+    <p:extLst>
+      <p:ext uri="{BB962C8B-B14F-4D97-AF65-F5344CB8AC3E}">
+        <p14:creationId xmlns:p14="http://schemas.microsoft.com/office/powerpoint/2010/main" val="2021135844"/>
+      </p:ext>
+    </p:extLst>
+  </p:cSld>
+  <p:clrMapOvr>
+    <a:masterClrMapping/>
+  </p:clrMapOvr>
+</p:sld>
+</file>
+
+<file path=ppt/slides/slide11.xml><?xml version="1.0" encoding="utf-8"?>
 <p:sld xmlns:a="http://schemas.openxmlformats.org/drawingml/2006/main" xmlns:r="http://schemas.openxmlformats.org/officeDocument/2006/relationships" xmlns:p="http://schemas.openxmlformats.org/presentationml/2006/main">
   <p:cSld name="Slide 10">
     <p:bg>
